--- a/media/resources/files/4-Amal - BagyttalganSandarXO.pptx
+++ b/media/resources/files/4-Amal - BagyttalganSandarXO.pptx
@@ -7689,7 +7689,7 @@
             </a:pPr>
             <a:r>
               <a:rPr lang="ru-RU" sz="3200" dirty="0"/>
-              <a:t>Турдуу пикирлер учун ыраазычылык билдиребиз.</a:t>
+              <a:t>Түрдүү пикирлер үчүн ыраазычылык билдиребиз.</a:t>
             </a:r>
           </a:p>
           <a:p>

--- a/media/resources/files/4-Amal - BagyttalganSandarXO.pptx
+++ b/media/resources/files/4-Amal - BagyttalganSandarXO.pptx
@@ -3635,7 +3635,7 @@
                 <a:latin typeface="Arial" panose="020B0604020202020204" pitchFamily="34" charset="0"/>
                 <a:cs typeface="Arial" panose="020B0604020202020204" pitchFamily="34" charset="0"/>
               </a:rPr>
-              <a:t>Мугалим үчүн жооп баракчасы жана таратма материалдар камтылган.</a:t>
+              <a:t>Мугалим үчүн жооп барагы жана таратма материалдар бар.</a:t>
             </a:r>
           </a:p>
           <a:p>
@@ -3664,7 +3664,7 @@
                 <a:latin typeface="Arial" panose="020B0604020202020204" pitchFamily="34" charset="0"/>
                 <a:cs typeface="Arial" panose="020B0604020202020204" pitchFamily="34" charset="0"/>
               </a:rPr>
-              <a:t>Кайсы команда туура жооп бергенине жараша '</a:t>
+              <a:t>Туура жооп берген командага жараша «</a:t>
             </a:r>
             <a:r>
               <a:rPr lang="en-GB" sz="2000" u="sng" dirty="0">
@@ -3674,7 +3674,7 @@
                 <a:latin typeface="Arial" panose="020B0604020202020204" pitchFamily="34" charset="0"/>
                 <a:cs typeface="Arial" panose="020B0604020202020204" pitchFamily="34" charset="0"/>
               </a:rPr>
-              <a:t>X' </a:t>
+              <a:t>X» </a:t>
             </a:r>
             <a:r>
               <a:rPr lang="ru-RU" sz="2000" u="sng" dirty="0">
@@ -3684,7 +3684,7 @@
                 <a:latin typeface="Arial" panose="020B0604020202020204" pitchFamily="34" charset="0"/>
                 <a:cs typeface="Arial" panose="020B0604020202020204" pitchFamily="34" charset="0"/>
               </a:rPr>
-              <a:t>же '</a:t>
+              <a:t>же «</a:t>
             </a:r>
             <a:r>
               <a:rPr lang="en-GB" sz="2000" u="sng" dirty="0">
@@ -3694,7 +3694,7 @@
                 <a:latin typeface="Arial" panose="020B0604020202020204" pitchFamily="34" charset="0"/>
                 <a:cs typeface="Arial" panose="020B0604020202020204" pitchFamily="34" charset="0"/>
               </a:rPr>
-              <a:t>O' </a:t>
+              <a:t>O» </a:t>
             </a:r>
             <a:r>
               <a:rPr lang="ru-RU" sz="2000" u="sng" dirty="0">
@@ -3704,7 +3704,7 @@
                 <a:latin typeface="Arial" panose="020B0604020202020204" pitchFamily="34" charset="0"/>
                 <a:cs typeface="Arial" panose="020B0604020202020204" pitchFamily="34" charset="0"/>
               </a:rPr>
-              <a:t>баскычын басыңыз/тийип коюңуз</a:t>
+              <a:t>баскычын басыңыз</a:t>
             </a:r>
             <a:r>
               <a:rPr lang="en-GB" sz="2000" dirty="0">
